--- a/Modul Minna 1/Bab 20/45. Minna 1 Tata Bahasa Bab 20 - Slide.pptx
+++ b/Modul Minna 1/Bab 20/45. Minna 1 Tata Bahasa Bab 20 - Slide.pptx
@@ -1988,7 +1988,7 @@
                 <a:ea typeface="Arial" pitchFamily="34" charset="-122"/>
                 <a:cs typeface="Arial" pitchFamily="34" charset="-120"/>
               </a:rPr>
-              <a:t>あしたとうきょうへいく。</a:t>
+              <a:t>あしたジャカルタへいく。</a:t>
             </a:r>
             <a:endParaRPr lang="en-US" sz="1700" dirty="0"/>
           </a:p>
@@ -2027,7 +2027,7 @@
                 <a:ea typeface="Arial" pitchFamily="34" charset="-122"/>
                 <a:cs typeface="Arial" pitchFamily="34" charset="-120"/>
               </a:rPr>
-              <a:t>ashita Toukyou e iku</a:t>
+              <a:t>ashita Jakaruta e iku</a:t>
             </a:r>
             <a:pPr indent="0" marL="0">
               <a:buNone/>
@@ -2055,7 +2055,7 @@
                 <a:ea typeface="Arial" pitchFamily="34" charset="-122"/>
                 <a:cs typeface="Arial" pitchFamily="34" charset="-120"/>
               </a:rPr>
-              <a:t>Besok pergi ke Tokyo. (santai)</a:t>
+              <a:t>Besok pergi ke Jakarta. (santai)</a:t>
             </a:r>
             <a:endParaRPr lang="en-US" sz="950" dirty="0"/>
           </a:p>
